--- a/VOIS_Major_Project_PPT.pptx
+++ b/VOIS_Major_Project_PPT.pptx
@@ -163,7 +163,7 @@
 <file path=ppt/revisionInfo.xml><?xml version="1.0" encoding="utf-8"?>
 <p1510:revInfo xmlns:a="http://schemas.openxmlformats.org/drawingml/2006/main" xmlns:r="http://schemas.openxmlformats.org/officeDocument/2006/relationships" xmlns:p1510="http://schemas.microsoft.com/office/powerpoint/2015/10/main">
   <p1510:revLst>
-    <p1510:client id="{5EFC87CC-F166-4953-8109-5884B6CB60D8}" v="2" dt="2026-09-09T14:59:21.281"/>
+    <p1510:client id="{5EFC87CC-F166-4953-8109-5884B6CB60D8}" v="6" dt="2026-09-09T15:08:28.083"/>
   </p1510:revLst>
 </p1510:revInfo>
 </file>
@@ -173,10 +173,25 @@
   <pc:docChgLst>
     <pc:chgData name="ygurubetti@gmail.com" userId="a588a26fb989e147" providerId="LiveId" clId="{234980D4-123C-4964-AD12-A6EEE24EACE6}"/>
     <pc:docChg chg="modSld">
-      <pc:chgData name="ygurubetti@gmail.com" userId="a588a26fb989e147" providerId="LiveId" clId="{234980D4-123C-4964-AD12-A6EEE24EACE6}" dt="2026-09-09T14:59:34.660" v="3" actId="1076"/>
+      <pc:chgData name="ygurubetti@gmail.com" userId="a588a26fb989e147" providerId="LiveId" clId="{234980D4-123C-4964-AD12-A6EEE24EACE6}" dt="2026-09-09T15:08:10.878" v="6"/>
       <pc:docMkLst>
         <pc:docMk/>
       </pc:docMkLst>
+      <pc:sldChg chg="modSp mod">
+        <pc:chgData name="ygurubetti@gmail.com" userId="a588a26fb989e147" providerId="LiveId" clId="{234980D4-123C-4964-AD12-A6EEE24EACE6}" dt="2026-09-09T15:07:47.974" v="5" actId="20577"/>
+        <pc:sldMkLst>
+          <pc:docMk/>
+          <pc:sldMk cId="3401748718" sldId="304"/>
+        </pc:sldMkLst>
+        <pc:spChg chg="mod">
+          <ac:chgData name="ygurubetti@gmail.com" userId="a588a26fb989e147" providerId="LiveId" clId="{234980D4-123C-4964-AD12-A6EEE24EACE6}" dt="2026-09-09T15:07:47.974" v="5" actId="20577"/>
+          <ac:spMkLst>
+            <pc:docMk/>
+            <pc:sldMk cId="3401748718" sldId="304"/>
+            <ac:spMk id="5" creationId="{EFA51A9C-7ADF-C3B6-A8CD-11CAA2EC3634}"/>
+          </ac:spMkLst>
+        </pc:spChg>
+      </pc:sldChg>
       <pc:sldChg chg="addSp modSp mod">
         <pc:chgData name="ygurubetti@gmail.com" userId="a588a26fb989e147" providerId="LiveId" clId="{234980D4-123C-4964-AD12-A6EEE24EACE6}" dt="2026-09-09T14:59:34.660" v="3" actId="1076"/>
         <pc:sldMkLst>
@@ -197,6 +212,21 @@
             <pc:docMk/>
             <pc:sldMk cId="1604013440" sldId="338"/>
             <ac:spMk id="10" creationId="{5C21FC12-B2E1-C4EB-8FA3-A29FE681053E}"/>
+          </ac:spMkLst>
+        </pc:spChg>
+      </pc:sldChg>
+      <pc:sldChg chg="modSp">
+        <pc:chgData name="ygurubetti@gmail.com" userId="a588a26fb989e147" providerId="LiveId" clId="{234980D4-123C-4964-AD12-A6EEE24EACE6}" dt="2026-09-09T15:08:10.878" v="6"/>
+        <pc:sldMkLst>
+          <pc:docMk/>
+          <pc:sldMk cId="3863610428" sldId="342"/>
+        </pc:sldMkLst>
+        <pc:spChg chg="mod">
+          <ac:chgData name="ygurubetti@gmail.com" userId="a588a26fb989e147" providerId="LiveId" clId="{234980D4-123C-4964-AD12-A6EEE24EACE6}" dt="2026-09-09T15:08:10.878" v="6"/>
+          <ac:spMkLst>
+            <pc:docMk/>
+            <pc:sldMk cId="3863610428" sldId="342"/>
+            <ac:spMk id="3" creationId="{938D7A86-1858-5407-3645-5718EB594039}"/>
           </ac:spMkLst>
         </pc:spChg>
       </pc:sldChg>
@@ -14402,7 +14432,7 @@
               <a:rPr lang="en-IN" dirty="0">
                 <a:hlinkClick r:id="rId3"/>
               </a:rPr>
-              <a:t>https://github.com/ygurubetti/Seasonal-Agriculture-Performance-Analysis</a:t>
+              <a:t>https://github.com/ygurubetti/Seasonal-Agriculture-Performance-Analysis/tree/main</a:t>
             </a:r>
             <a:endParaRPr lang="en-IN" dirty="0"/>
           </a:p>
@@ -17197,9 +17227,9 @@
             </a:r>
             <a:r>
               <a:rPr lang="en-IN" dirty="0">
-                <a:latin typeface="+mn-lt"/>
+                <a:hlinkClick r:id="rId3"/>
               </a:rPr>
-              <a:t>[https://github.com/](https://github.com/)&lt;your-username&gt;/seasonal-agriculture-performance-analysis</a:t>
+              <a:t>https://github.com/ygurubetti/Seasonal-Agriculture-Performance-Analysis/tree/main</a:t>
             </a:r>
             <a:endParaRPr lang="en-IN" dirty="0"/>
           </a:p>
@@ -17218,7 +17248,7 @@
             </a:r>
             <a:r>
               <a:rPr lang="en-IN" dirty="0">
-                <a:hlinkClick r:id="rId3"/>
+                <a:hlinkClick r:id="rId4"/>
               </a:rPr>
               <a:t>ygurubetti@gmail.com</a:t>
             </a:r>
@@ -18520,8 +18550,8 @@
           <a:chExt cx="0" cy="0"/>
         </a:xfrm>
       </p:grpSpPr>
-      <mc:AlternateContent xmlns:mc="http://schemas.openxmlformats.org/markup-compatibility/2006">
-        <mc:Choice xmlns:a14="http://schemas.microsoft.com/office/drawing/2010/main" Requires="a14">
+      <mc:AlternateContent xmlns:mc="http://schemas.openxmlformats.org/markup-compatibility/2006" xmlns:a14="http://schemas.microsoft.com/office/drawing/2010/main">
+        <mc:Choice Requires="a14">
           <p:sp>
             <p:nvSpPr>
               <p:cNvPr id="3" name="Title 2">
@@ -18610,11 +18640,15 @@
                 <a14:m>
                   <m:oMath xmlns:m="http://schemas.openxmlformats.org/officeDocument/2006/math">
                     <m:r>
-                      <a:rPr lang="en-IN" sz="2000" b="0" i="1"/>
+                      <a:rPr lang="en-IN" sz="2000" b="0" i="1">
+                        <a:latin typeface="Cambria Math" panose="02040503050406030204" pitchFamily="18" charset="0"/>
+                      </a:rPr>
                       <m:t>𝑝</m:t>
                     </m:r>
                     <m:r>
-                      <a:rPr lang="en-IN" sz="2000" b="0"/>
+                      <a:rPr lang="en-IN" sz="2000" b="0">
+                        <a:latin typeface="Cambria Math" panose="02040503050406030204" pitchFamily="18" charset="0"/>
+                      </a:rPr>
                       <m:t>&lt;0.001</m:t>
                     </m:r>
                   </m:oMath>
@@ -18642,7 +18676,7 @@
             </p:txBody>
           </p:sp>
         </mc:Choice>
-        <mc:Fallback>
+        <mc:Fallback xmlns="">
           <p:sp>
             <p:nvSpPr>
               <p:cNvPr id="3" name="Title 2">
@@ -28293,15 +28327,6 @@
 </file>
 
 <file path=customXml/item2.xml><?xml version="1.0" encoding="utf-8"?>
-<?mso-contentType ?>
-<FormTemplates xmlns="http://schemas.microsoft.com/sharepoint/v3/contenttype/forms">
-  <Display>DocumentLibraryForm</Display>
-  <Edit>DocumentLibraryForm</Edit>
-  <New>DocumentLibraryForm</New>
-</FormTemplates>
-</file>
-
-<file path=customXml/item3.xml><?xml version="1.0" encoding="utf-8"?>
 <ct:contentTypeSchema xmlns:ct="http://schemas.microsoft.com/office/2006/metadata/contentType" xmlns:ma="http://schemas.microsoft.com/office/2006/metadata/properties/metaAttributes" ct:_="" ma:_="" ma:contentTypeName="Document" ma:contentTypeID="0x01010079F111ED35F8CC479449609E8A0923A6" ma:contentTypeVersion="12" ma:contentTypeDescription="Create a new document." ma:contentTypeScope="" ma:versionID="426e97fa315356fffbdcd9876fe988c2">
   <xsd:schema xmlns:xsd="http://www.w3.org/2001/XMLSchema" xmlns:xs="http://www.w3.org/2001/XMLSchema" xmlns:p="http://schemas.microsoft.com/office/2006/metadata/properties" xmlns:ns2="71af3243-3dd4-4a8d-8c0d-dd76da1f02a5" xmlns:ns3="16c05727-aa75-4e4a-9b5f-8a80a1165891" targetNamespace="http://schemas.microsoft.com/office/2006/metadata/properties" ma:root="true" ma:fieldsID="14b8f0def80e6d70ce3def20c90759ae" ns2:_="" ns3:_="">
     <xsd:import namespace="71af3243-3dd4-4a8d-8c0d-dd76da1f02a5"/>
@@ -28522,6 +28547,15 @@
 </ct:contentTypeSchema>
 </file>
 
+<file path=customXml/item3.xml><?xml version="1.0" encoding="utf-8"?>
+<?mso-contentType ?>
+<FormTemplates xmlns="http://schemas.microsoft.com/sharepoint/v3/contenttype/forms">
+  <Display>DocumentLibraryForm</Display>
+  <Edit>DocumentLibraryForm</Edit>
+  <New>DocumentLibraryForm</New>
+</FormTemplates>
+</file>
+
 <file path=customXml/itemProps1.xml><?xml version="1.0" encoding="utf-8"?>
 <ds:datastoreItem xmlns:ds="http://schemas.openxmlformats.org/officeDocument/2006/customXml" ds:itemID="{4DEA9014-ED64-4558-B1E1-D03F0EE32BEB}">
   <ds:schemaRefs>
@@ -28533,14 +28567,6 @@
 </file>
 
 <file path=customXml/itemProps2.xml><?xml version="1.0" encoding="utf-8"?>
-<ds:datastoreItem xmlns:ds="http://schemas.openxmlformats.org/officeDocument/2006/customXml" ds:itemID="{05D99ABA-76CE-4A8E-B5F0-C051B96628DE}">
-  <ds:schemaRefs>
-    <ds:schemaRef ds:uri="http://schemas.microsoft.com/sharepoint/v3/contenttype/forms"/>
-  </ds:schemaRefs>
-</ds:datastoreItem>
-</file>
-
-<file path=customXml/itemProps3.xml><?xml version="1.0" encoding="utf-8"?>
 <ds:datastoreItem xmlns:ds="http://schemas.openxmlformats.org/officeDocument/2006/customXml" ds:itemID="{B19EB750-A6DA-4BE8-B87B-FC499FE73360}">
   <ds:schemaRefs>
     <ds:schemaRef ds:uri="http://schemas.microsoft.com/office/2006/metadata/contentType"/>
@@ -28557,4 +28583,12 @@
     <ds:schemaRef ds:uri="http://schemas.microsoft.com/internal/obd"/>
   </ds:schemaRefs>
 </ds:datastoreItem>
+</file>
+
+<file path=customXml/itemProps3.xml><?xml version="1.0" encoding="utf-8"?>
+<ds:datastoreItem xmlns:ds="http://schemas.openxmlformats.org/officeDocument/2006/customXml" ds:itemID="{05D99ABA-76CE-4A8E-B5F0-C051B96628DE}">
+  <ds:schemaRefs>
+    <ds:schemaRef ds:uri="http://schemas.microsoft.com/sharepoint/v3/contenttype/forms"/>
+  </ds:schemaRefs>
+</ds:datastoreItem>
 </file>